--- a/BSTS_SC/bsts_figures.pptx
+++ b/BSTS_SC/bsts_figures.pptx
@@ -11,6 +11,7 @@
     <p:sldId id="259" r:id="rId5"/>
     <p:sldId id="260" r:id="rId6"/>
     <p:sldId id="261" r:id="rId7"/>
+    <p:sldId id="262" r:id="rId8"/>
   </p:sldIdLst>
   <p:sldSz cx="12192000" cy="6858000"/>
   <p:notesSz cx="6858000" cy="9144000"/>
@@ -264,7 +265,7 @@
           <a:p>
             <a:fld id="{D7DDB708-3F78-914C-AAA5-91CCF26A9EAE}" type="datetimeFigureOut">
               <a:rPr lang="en-US" smtClean="0"/>
-              <a:t>3/12/25</a:t>
+              <a:t>3/13/25</a:t>
             </a:fld>
             <a:endParaRPr lang="en-US"/>
           </a:p>
@@ -462,7 +463,7 @@
           <a:p>
             <a:fld id="{D7DDB708-3F78-914C-AAA5-91CCF26A9EAE}" type="datetimeFigureOut">
               <a:rPr lang="en-US" smtClean="0"/>
-              <a:t>3/12/25</a:t>
+              <a:t>3/13/25</a:t>
             </a:fld>
             <a:endParaRPr lang="en-US"/>
           </a:p>
@@ -670,7 +671,7 @@
           <a:p>
             <a:fld id="{D7DDB708-3F78-914C-AAA5-91CCF26A9EAE}" type="datetimeFigureOut">
               <a:rPr lang="en-US" smtClean="0"/>
-              <a:t>3/12/25</a:t>
+              <a:t>3/13/25</a:t>
             </a:fld>
             <a:endParaRPr lang="en-US"/>
           </a:p>
@@ -868,7 +869,7 @@
           <a:p>
             <a:fld id="{D7DDB708-3F78-914C-AAA5-91CCF26A9EAE}" type="datetimeFigureOut">
               <a:rPr lang="en-US" smtClean="0"/>
-              <a:t>3/12/25</a:t>
+              <a:t>3/13/25</a:t>
             </a:fld>
             <a:endParaRPr lang="en-US"/>
           </a:p>
@@ -1143,7 +1144,7 @@
           <a:p>
             <a:fld id="{D7DDB708-3F78-914C-AAA5-91CCF26A9EAE}" type="datetimeFigureOut">
               <a:rPr lang="en-US" smtClean="0"/>
-              <a:t>3/12/25</a:t>
+              <a:t>3/13/25</a:t>
             </a:fld>
             <a:endParaRPr lang="en-US"/>
           </a:p>
@@ -1408,7 +1409,7 @@
           <a:p>
             <a:fld id="{D7DDB708-3F78-914C-AAA5-91CCF26A9EAE}" type="datetimeFigureOut">
               <a:rPr lang="en-US" smtClean="0"/>
-              <a:t>3/12/25</a:t>
+              <a:t>3/13/25</a:t>
             </a:fld>
             <a:endParaRPr lang="en-US"/>
           </a:p>
@@ -1820,7 +1821,7 @@
           <a:p>
             <a:fld id="{D7DDB708-3F78-914C-AAA5-91CCF26A9EAE}" type="datetimeFigureOut">
               <a:rPr lang="en-US" smtClean="0"/>
-              <a:t>3/12/25</a:t>
+              <a:t>3/13/25</a:t>
             </a:fld>
             <a:endParaRPr lang="en-US"/>
           </a:p>
@@ -1961,7 +1962,7 @@
           <a:p>
             <a:fld id="{D7DDB708-3F78-914C-AAA5-91CCF26A9EAE}" type="datetimeFigureOut">
               <a:rPr lang="en-US" smtClean="0"/>
-              <a:t>3/12/25</a:t>
+              <a:t>3/13/25</a:t>
             </a:fld>
             <a:endParaRPr lang="en-US"/>
           </a:p>
@@ -2074,7 +2075,7 @@
           <a:p>
             <a:fld id="{D7DDB708-3F78-914C-AAA5-91CCF26A9EAE}" type="datetimeFigureOut">
               <a:rPr lang="en-US" smtClean="0"/>
-              <a:t>3/12/25</a:t>
+              <a:t>3/13/25</a:t>
             </a:fld>
             <a:endParaRPr lang="en-US"/>
           </a:p>
@@ -2385,7 +2386,7 @@
           <a:p>
             <a:fld id="{D7DDB708-3F78-914C-AAA5-91CCF26A9EAE}" type="datetimeFigureOut">
               <a:rPr lang="en-US" smtClean="0"/>
-              <a:t>3/12/25</a:t>
+              <a:t>3/13/25</a:t>
             </a:fld>
             <a:endParaRPr lang="en-US"/>
           </a:p>
@@ -2673,7 +2674,7 @@
           <a:p>
             <a:fld id="{D7DDB708-3F78-914C-AAA5-91CCF26A9EAE}" type="datetimeFigureOut">
               <a:rPr lang="en-US" smtClean="0"/>
-              <a:t>3/12/25</a:t>
+              <a:t>3/13/25</a:t>
             </a:fld>
             <a:endParaRPr lang="en-US"/>
           </a:p>
@@ -2914,7 +2915,7 @@
           <a:p>
             <a:fld id="{D7DDB708-3F78-914C-AAA5-91CCF26A9EAE}" type="datetimeFigureOut">
               <a:rPr lang="en-US" smtClean="0"/>
-              <a:t>3/12/25</a:t>
+              <a:t>3/13/25</a:t>
             </a:fld>
             <a:endParaRPr lang="en-US"/>
           </a:p>
@@ -3944,6 +3945,152 @@
 </p:sld>
 </file>
 
+<file path=ppt/slides/slide7.xml><?xml version="1.0" encoding="utf-8"?>
+<p:sld xmlns:a="http://schemas.openxmlformats.org/drawingml/2006/main" xmlns:r="http://schemas.openxmlformats.org/officeDocument/2006/relationships" xmlns:p="http://schemas.openxmlformats.org/presentationml/2006/main">
+  <p:cSld>
+    <p:spTree>
+      <p:nvGrpSpPr>
+        <p:cNvPr id="1" name=""/>
+        <p:cNvGrpSpPr/>
+        <p:nvPr/>
+      </p:nvGrpSpPr>
+      <p:grpSpPr>
+        <a:xfrm>
+          <a:off x="0" y="0"/>
+          <a:ext cx="0" cy="0"/>
+          <a:chOff x="0" y="0"/>
+          <a:chExt cx="0" cy="0"/>
+        </a:xfrm>
+      </p:grpSpPr>
+      <p:sp>
+        <p:nvSpPr>
+          <p:cNvPr id="2" name="AutoShape 2">
+            <a:extLst>
+              <a:ext uri="{FF2B5EF4-FFF2-40B4-BE49-F238E27FC236}">
+                <a16:creationId xmlns:a16="http://schemas.microsoft.com/office/drawing/2014/main" id="{53A12884-3375-326A-8D8E-F3C0F68361A9}"/>
+              </a:ext>
+            </a:extLst>
+          </p:cNvPr>
+          <p:cNvSpPr>
+            <a:spLocks noChangeAspect="1" noChangeArrowheads="1"/>
+          </p:cNvSpPr>
+          <p:nvPr/>
+        </p:nvSpPr>
+        <p:spPr bwMode="auto">
+          <a:xfrm>
+            <a:off x="5943600" y="3276600"/>
+            <a:ext cx="304800" cy="304800"/>
+          </a:xfrm>
+          <a:prstGeom prst="rect">
+            <a:avLst/>
+          </a:prstGeom>
+          <a:noFill/>
+          <a:extLst>
+            <a:ext uri="{909E8E84-426E-40DD-AFC4-6F175D3DCCD1}">
+              <a14:hiddenFill xmlns:a14="http://schemas.microsoft.com/office/drawing/2010/main">
+                <a:solidFill>
+                  <a:srgbClr val="FFFFFF"/>
+                </a:solidFill>
+              </a14:hiddenFill>
+            </a:ext>
+          </a:extLst>
+        </p:spPr>
+        <p:txBody>
+          <a:bodyPr vert="horz" wrap="square" lIns="91440" tIns="45720" rIns="91440" bIns="45720" numCol="1" anchor="t" anchorCtr="0" compatLnSpc="1">
+            <a:prstTxWarp prst="textNoShape">
+              <a:avLst/>
+            </a:prstTxWarp>
+          </a:bodyPr>
+          <a:lstStyle/>
+          <a:p>
+            <a:endParaRPr lang="en-US" dirty="0"/>
+          </a:p>
+        </p:txBody>
+      </p:sp>
+      <p:pic>
+        <p:nvPicPr>
+          <p:cNvPr id="5" name="Picture 4" descr="A graph showing a sound wave&#10;&#10;AI-generated content may be incorrect.">
+            <a:extLst>
+              <a:ext uri="{FF2B5EF4-FFF2-40B4-BE49-F238E27FC236}">
+                <a16:creationId xmlns:a16="http://schemas.microsoft.com/office/drawing/2014/main" id="{86AB4378-E638-7370-0753-6EB8E744921C}"/>
+              </a:ext>
+            </a:extLst>
+          </p:cNvPr>
+          <p:cNvPicPr>
+            <a:picLocks noChangeAspect="1"/>
+          </p:cNvPicPr>
+          <p:nvPr/>
+        </p:nvPicPr>
+        <p:blipFill>
+          <a:blip r:embed="rId2"/>
+          <a:stretch>
+            <a:fillRect/>
+          </a:stretch>
+        </p:blipFill>
+        <p:spPr>
+          <a:xfrm>
+            <a:off x="2209799" y="1229923"/>
+            <a:ext cx="7772400" cy="4398154"/>
+          </a:xfrm>
+          <a:prstGeom prst="rect">
+            <a:avLst/>
+          </a:prstGeom>
+        </p:spPr>
+      </p:pic>
+      <p:sp>
+        <p:nvSpPr>
+          <p:cNvPr id="6" name="TextBox 5">
+            <a:extLst>
+              <a:ext uri="{FF2B5EF4-FFF2-40B4-BE49-F238E27FC236}">
+                <a16:creationId xmlns:a16="http://schemas.microsoft.com/office/drawing/2014/main" id="{8FB6C40D-3ABB-FEE8-6369-D0FAD479CDF9}"/>
+              </a:ext>
+            </a:extLst>
+          </p:cNvPr>
+          <p:cNvSpPr txBox="1"/>
+          <p:nvPr/>
+        </p:nvSpPr>
+        <p:spPr>
+          <a:xfrm>
+            <a:off x="3395950" y="1600112"/>
+            <a:ext cx="5704900" cy="369332"/>
+          </a:xfrm>
+          <a:prstGeom prst="rect">
+            <a:avLst/>
+          </a:prstGeom>
+          <a:solidFill>
+            <a:schemeClr val="bg1"/>
+          </a:solidFill>
+        </p:spPr>
+        <p:txBody>
+          <a:bodyPr wrap="square" rtlCol="0">
+            <a:spAutoFit/>
+          </a:bodyPr>
+          <a:lstStyle/>
+          <a:p>
+            <a:pPr algn="ctr"/>
+            <a:r>
+              <a:rPr lang="en-US" b="1" dirty="0">
+                <a:latin typeface="Arial" panose="020B0604020202020204" pitchFamily="34" charset="0"/>
+                <a:cs typeface="Arial" panose="020B0604020202020204" pitchFamily="34" charset="0"/>
+              </a:rPr>
+              <a:t>BSTS Seasonal Differenced AR(5) Model Forecast</a:t>
+            </a:r>
+          </a:p>
+        </p:txBody>
+      </p:sp>
+    </p:spTree>
+    <p:extLst>
+      <p:ext uri="{BB962C8B-B14F-4D97-AF65-F5344CB8AC3E}">
+        <p14:creationId xmlns:p14="http://schemas.microsoft.com/office/powerpoint/2010/main" val="2500172074"/>
+      </p:ext>
+    </p:extLst>
+  </p:cSld>
+  <p:clrMapOvr>
+    <a:masterClrMapping/>
+  </p:clrMapOvr>
+</p:sld>
+</file>
+
 <file path=ppt/theme/theme1.xml><?xml version="1.0" encoding="utf-8"?>
 <a:theme xmlns:a="http://schemas.openxmlformats.org/drawingml/2006/main" name="Office Theme">
   <a:themeElements>

--- a/BSTS_SC/bsts_figures.pptx
+++ b/BSTS_SC/bsts_figures.pptx
@@ -6,12 +6,13 @@
   </p:sldMasterIdLst>
   <p:sldIdLst>
     <p:sldId id="256" r:id="rId2"/>
-    <p:sldId id="257" r:id="rId3"/>
-    <p:sldId id="258" r:id="rId4"/>
-    <p:sldId id="259" r:id="rId5"/>
-    <p:sldId id="260" r:id="rId6"/>
-    <p:sldId id="261" r:id="rId7"/>
-    <p:sldId id="262" r:id="rId8"/>
+    <p:sldId id="263" r:id="rId3"/>
+    <p:sldId id="257" r:id="rId4"/>
+    <p:sldId id="258" r:id="rId5"/>
+    <p:sldId id="259" r:id="rId6"/>
+    <p:sldId id="260" r:id="rId7"/>
+    <p:sldId id="261" r:id="rId8"/>
+    <p:sldId id="262" r:id="rId9"/>
   </p:sldIdLst>
   <p:sldSz cx="12192000" cy="6858000"/>
   <p:notesSz cx="6858000" cy="9144000"/>
@@ -3435,6 +3436,107 @@
       </p:grpSpPr>
       <p:pic>
         <p:nvPicPr>
+          <p:cNvPr id="3" name="Picture 2" descr="A graph of a graph of a graph&#10;&#10;AI-generated content may be incorrect.">
+            <a:extLst>
+              <a:ext uri="{FF2B5EF4-FFF2-40B4-BE49-F238E27FC236}">
+                <a16:creationId xmlns:a16="http://schemas.microsoft.com/office/drawing/2014/main" id="{8B00F022-1B21-E274-712E-7E37B34F44DF}"/>
+              </a:ext>
+            </a:extLst>
+          </p:cNvPr>
+          <p:cNvPicPr>
+            <a:picLocks noChangeAspect="1"/>
+          </p:cNvPicPr>
+          <p:nvPr/>
+        </p:nvPicPr>
+        <p:blipFill>
+          <a:blip r:embed="rId2"/>
+          <a:stretch>
+            <a:fillRect/>
+          </a:stretch>
+        </p:blipFill>
+        <p:spPr>
+          <a:xfrm>
+            <a:off x="2762250" y="1371600"/>
+            <a:ext cx="6667500" cy="4114800"/>
+          </a:xfrm>
+          <a:prstGeom prst="rect">
+            <a:avLst/>
+          </a:prstGeom>
+        </p:spPr>
+      </p:pic>
+      <p:sp>
+        <p:nvSpPr>
+          <p:cNvPr id="4" name="TextBox 3">
+            <a:extLst>
+              <a:ext uri="{FF2B5EF4-FFF2-40B4-BE49-F238E27FC236}">
+                <a16:creationId xmlns:a16="http://schemas.microsoft.com/office/drawing/2014/main" id="{1A92BD56-4C4C-B197-C8BE-80011C997F2D}"/>
+              </a:ext>
+            </a:extLst>
+          </p:cNvPr>
+          <p:cNvSpPr txBox="1"/>
+          <p:nvPr/>
+        </p:nvSpPr>
+        <p:spPr>
+          <a:xfrm>
+            <a:off x="2879075" y="1371600"/>
+            <a:ext cx="6433850" cy="369332"/>
+          </a:xfrm>
+          <a:prstGeom prst="rect">
+            <a:avLst/>
+          </a:prstGeom>
+          <a:solidFill>
+            <a:schemeClr val="bg1"/>
+          </a:solidFill>
+        </p:spPr>
+        <p:txBody>
+          <a:bodyPr wrap="square" rtlCol="0">
+            <a:spAutoFit/>
+          </a:bodyPr>
+          <a:lstStyle/>
+          <a:p>
+            <a:pPr algn="ctr"/>
+            <a:r>
+              <a:rPr lang="en-US" b="1" dirty="0">
+                <a:latin typeface="Arial" panose="020B0604020202020204" pitchFamily="34" charset="0"/>
+                <a:cs typeface="Arial" panose="020B0604020202020204" pitchFamily="34" charset="0"/>
+              </a:rPr>
+              <a:t>STL Decomposition</a:t>
+            </a:r>
+          </a:p>
+        </p:txBody>
+      </p:sp>
+    </p:spTree>
+    <p:extLst>
+      <p:ext uri="{BB962C8B-B14F-4D97-AF65-F5344CB8AC3E}">
+        <p14:creationId xmlns:p14="http://schemas.microsoft.com/office/powerpoint/2010/main" val="3148588917"/>
+      </p:ext>
+    </p:extLst>
+  </p:cSld>
+  <p:clrMapOvr>
+    <a:masterClrMapping/>
+  </p:clrMapOvr>
+</p:sld>
+</file>
+
+<file path=ppt/slides/slide3.xml><?xml version="1.0" encoding="utf-8"?>
+<p:sld xmlns:a="http://schemas.openxmlformats.org/drawingml/2006/main" xmlns:r="http://schemas.openxmlformats.org/officeDocument/2006/relationships" xmlns:p="http://schemas.openxmlformats.org/presentationml/2006/main">
+  <p:cSld>
+    <p:spTree>
+      <p:nvGrpSpPr>
+        <p:cNvPr id="1" name=""/>
+        <p:cNvGrpSpPr/>
+        <p:nvPr/>
+      </p:nvGrpSpPr>
+      <p:grpSpPr>
+        <a:xfrm>
+          <a:off x="0" y="0"/>
+          <a:ext cx="0" cy="0"/>
+          <a:chOff x="0" y="0"/>
+          <a:chExt cx="0" cy="0"/>
+        </a:xfrm>
+      </p:grpSpPr>
+      <p:pic>
+        <p:nvPicPr>
           <p:cNvPr id="4" name="Picture 3" descr="A graph with numbers and lines&#10;&#10;AI-generated content may be incorrect.">
             <a:extLst>
               <a:ext uri="{FF2B5EF4-FFF2-40B4-BE49-F238E27FC236}">
@@ -3517,7 +3619,7 @@
 </p:sld>
 </file>
 
-<file path=ppt/slides/slide3.xml><?xml version="1.0" encoding="utf-8"?>
+<file path=ppt/slides/slide4.xml><?xml version="1.0" encoding="utf-8"?>
 <p:sld xmlns:a="http://schemas.openxmlformats.org/drawingml/2006/main" xmlns:r="http://schemas.openxmlformats.org/officeDocument/2006/relationships" xmlns:p="http://schemas.openxmlformats.org/presentationml/2006/main">
   <p:cSld>
     <p:spTree>
@@ -3624,7 +3726,7 @@
 </p:sld>
 </file>
 
-<file path=ppt/slides/slide4.xml><?xml version="1.0" encoding="utf-8"?>
+<file path=ppt/slides/slide5.xml><?xml version="1.0" encoding="utf-8"?>
 <p:sld xmlns:a="http://schemas.openxmlformats.org/drawingml/2006/main" xmlns:r="http://schemas.openxmlformats.org/officeDocument/2006/relationships" xmlns:p="http://schemas.openxmlformats.org/presentationml/2006/main">
   <p:cSld>
     <p:spTree>
@@ -3731,7 +3833,7 @@
 </p:sld>
 </file>
 
-<file path=ppt/slides/slide5.xml><?xml version="1.0" encoding="utf-8"?>
+<file path=ppt/slides/slide6.xml><?xml version="1.0" encoding="utf-8"?>
 <p:sld xmlns:a="http://schemas.openxmlformats.org/drawingml/2006/main" xmlns:r="http://schemas.openxmlformats.org/officeDocument/2006/relationships" xmlns:p="http://schemas.openxmlformats.org/presentationml/2006/main">
   <p:cSld>
     <p:spTree>
@@ -3838,7 +3940,7 @@
 </p:sld>
 </file>
 
-<file path=ppt/slides/slide6.xml><?xml version="1.0" encoding="utf-8"?>
+<file path=ppt/slides/slide7.xml><?xml version="1.0" encoding="utf-8"?>
 <p:sld xmlns:a="http://schemas.openxmlformats.org/drawingml/2006/main" xmlns:r="http://schemas.openxmlformats.org/officeDocument/2006/relationships" xmlns:p="http://schemas.openxmlformats.org/presentationml/2006/main">
   <p:cSld>
     <p:spTree>
@@ -3945,7 +4047,7 @@
 </p:sld>
 </file>
 
-<file path=ppt/slides/slide7.xml><?xml version="1.0" encoding="utf-8"?>
+<file path=ppt/slides/slide8.xml><?xml version="1.0" encoding="utf-8"?>
 <p:sld xmlns:a="http://schemas.openxmlformats.org/drawingml/2006/main" xmlns:r="http://schemas.openxmlformats.org/officeDocument/2006/relationships" xmlns:p="http://schemas.openxmlformats.org/presentationml/2006/main">
   <p:cSld>
     <p:spTree>

--- a/BSTS_SC/bsts_figures.pptx
+++ b/BSTS_SC/bsts_figures.pptx
@@ -266,7 +266,7 @@
           <a:p>
             <a:fld id="{D7DDB708-3F78-914C-AAA5-91CCF26A9EAE}" type="datetimeFigureOut">
               <a:rPr lang="en-US" smtClean="0"/>
-              <a:t>3/13/25</a:t>
+              <a:t>3/14/25</a:t>
             </a:fld>
             <a:endParaRPr lang="en-US"/>
           </a:p>
@@ -464,7 +464,7 @@
           <a:p>
             <a:fld id="{D7DDB708-3F78-914C-AAA5-91CCF26A9EAE}" type="datetimeFigureOut">
               <a:rPr lang="en-US" smtClean="0"/>
-              <a:t>3/13/25</a:t>
+              <a:t>3/14/25</a:t>
             </a:fld>
             <a:endParaRPr lang="en-US"/>
           </a:p>
@@ -672,7 +672,7 @@
           <a:p>
             <a:fld id="{D7DDB708-3F78-914C-AAA5-91CCF26A9EAE}" type="datetimeFigureOut">
               <a:rPr lang="en-US" smtClean="0"/>
-              <a:t>3/13/25</a:t>
+              <a:t>3/14/25</a:t>
             </a:fld>
             <a:endParaRPr lang="en-US"/>
           </a:p>
@@ -870,7 +870,7 @@
           <a:p>
             <a:fld id="{D7DDB708-3F78-914C-AAA5-91CCF26A9EAE}" type="datetimeFigureOut">
               <a:rPr lang="en-US" smtClean="0"/>
-              <a:t>3/13/25</a:t>
+              <a:t>3/14/25</a:t>
             </a:fld>
             <a:endParaRPr lang="en-US"/>
           </a:p>
@@ -1145,7 +1145,7 @@
           <a:p>
             <a:fld id="{D7DDB708-3F78-914C-AAA5-91CCF26A9EAE}" type="datetimeFigureOut">
               <a:rPr lang="en-US" smtClean="0"/>
-              <a:t>3/13/25</a:t>
+              <a:t>3/14/25</a:t>
             </a:fld>
             <a:endParaRPr lang="en-US"/>
           </a:p>
@@ -1410,7 +1410,7 @@
           <a:p>
             <a:fld id="{D7DDB708-3F78-914C-AAA5-91CCF26A9EAE}" type="datetimeFigureOut">
               <a:rPr lang="en-US" smtClean="0"/>
-              <a:t>3/13/25</a:t>
+              <a:t>3/14/25</a:t>
             </a:fld>
             <a:endParaRPr lang="en-US"/>
           </a:p>
@@ -1822,7 +1822,7 @@
           <a:p>
             <a:fld id="{D7DDB708-3F78-914C-AAA5-91CCF26A9EAE}" type="datetimeFigureOut">
               <a:rPr lang="en-US" smtClean="0"/>
-              <a:t>3/13/25</a:t>
+              <a:t>3/14/25</a:t>
             </a:fld>
             <a:endParaRPr lang="en-US"/>
           </a:p>
@@ -1963,7 +1963,7 @@
           <a:p>
             <a:fld id="{D7DDB708-3F78-914C-AAA5-91CCF26A9EAE}" type="datetimeFigureOut">
               <a:rPr lang="en-US" smtClean="0"/>
-              <a:t>3/13/25</a:t>
+              <a:t>3/14/25</a:t>
             </a:fld>
             <a:endParaRPr lang="en-US"/>
           </a:p>
@@ -2076,7 +2076,7 @@
           <a:p>
             <a:fld id="{D7DDB708-3F78-914C-AAA5-91CCF26A9EAE}" type="datetimeFigureOut">
               <a:rPr lang="en-US" smtClean="0"/>
-              <a:t>3/13/25</a:t>
+              <a:t>3/14/25</a:t>
             </a:fld>
             <a:endParaRPr lang="en-US"/>
           </a:p>
@@ -2387,7 +2387,7 @@
           <a:p>
             <a:fld id="{D7DDB708-3F78-914C-AAA5-91CCF26A9EAE}" type="datetimeFigureOut">
               <a:rPr lang="en-US" smtClean="0"/>
-              <a:t>3/13/25</a:t>
+              <a:t>3/14/25</a:t>
             </a:fld>
             <a:endParaRPr lang="en-US"/>
           </a:p>
@@ -2675,7 +2675,7 @@
           <a:p>
             <a:fld id="{D7DDB708-3F78-914C-AAA5-91CCF26A9EAE}" type="datetimeFigureOut">
               <a:rPr lang="en-US" smtClean="0"/>
-              <a:t>3/13/25</a:t>
+              <a:t>3/14/25</a:t>
             </a:fld>
             <a:endParaRPr lang="en-US"/>
           </a:p>
@@ -2916,7 +2916,7 @@
           <a:p>
             <a:fld id="{D7DDB708-3F78-914C-AAA5-91CCF26A9EAE}" type="datetimeFigureOut">
               <a:rPr lang="en-US" smtClean="0"/>
-              <a:t>3/13/25</a:t>
+              <a:t>3/14/25</a:t>
             </a:fld>
             <a:endParaRPr lang="en-US"/>
           </a:p>
@@ -4064,6 +4064,36 @@
           <a:chExt cx="0" cy="0"/>
         </a:xfrm>
       </p:grpSpPr>
+      <p:pic>
+        <p:nvPicPr>
+          <p:cNvPr id="4" name="Picture 3" descr="A graph with a blue line and green line&#10;&#10;AI-generated content may be incorrect.">
+            <a:extLst>
+              <a:ext uri="{FF2B5EF4-FFF2-40B4-BE49-F238E27FC236}">
+                <a16:creationId xmlns:a16="http://schemas.microsoft.com/office/drawing/2014/main" id="{6A0DC1D8-11C7-A788-505C-81CB8D6A89B8}"/>
+              </a:ext>
+            </a:extLst>
+          </p:cNvPr>
+          <p:cNvPicPr>
+            <a:picLocks noChangeAspect="1"/>
+          </p:cNvPicPr>
+          <p:nvPr/>
+        </p:nvPicPr>
+        <p:blipFill>
+          <a:blip r:embed="rId2"/>
+          <a:stretch>
+            <a:fillRect/>
+          </a:stretch>
+        </p:blipFill>
+        <p:spPr>
+          <a:xfrm>
+            <a:off x="2209800" y="1229923"/>
+            <a:ext cx="7772400" cy="4398154"/>
+          </a:xfrm>
+          <a:prstGeom prst="rect">
+            <a:avLst/>
+          </a:prstGeom>
+        </p:spPr>
+      </p:pic>
       <p:sp>
         <p:nvSpPr>
           <p:cNvPr id="2" name="AutoShape 2">
@@ -4109,36 +4139,6 @@
           </a:p>
         </p:txBody>
       </p:sp>
-      <p:pic>
-        <p:nvPicPr>
-          <p:cNvPr id="5" name="Picture 4" descr="A graph showing a sound wave&#10;&#10;AI-generated content may be incorrect.">
-            <a:extLst>
-              <a:ext uri="{FF2B5EF4-FFF2-40B4-BE49-F238E27FC236}">
-                <a16:creationId xmlns:a16="http://schemas.microsoft.com/office/drawing/2014/main" id="{86AB4378-E638-7370-0753-6EB8E744921C}"/>
-              </a:ext>
-            </a:extLst>
-          </p:cNvPr>
-          <p:cNvPicPr>
-            <a:picLocks noChangeAspect="1"/>
-          </p:cNvPicPr>
-          <p:nvPr/>
-        </p:nvPicPr>
-        <p:blipFill>
-          <a:blip r:embed="rId2"/>
-          <a:stretch>
-            <a:fillRect/>
-          </a:stretch>
-        </p:blipFill>
-        <p:spPr>
-          <a:xfrm>
-            <a:off x="2209799" y="1229923"/>
-            <a:ext cx="7772400" cy="4398154"/>
-          </a:xfrm>
-          <a:prstGeom prst="rect">
-            <a:avLst/>
-          </a:prstGeom>
-        </p:spPr>
-      </p:pic>
       <p:sp>
         <p:nvSpPr>
           <p:cNvPr id="6" name="TextBox 5">
@@ -4176,6 +4176,47 @@
                 <a:cs typeface="Arial" panose="020B0604020202020204" pitchFamily="34" charset="0"/>
               </a:rPr>
               <a:t>BSTS Seasonal Differenced AR(5) Model Forecast</a:t>
+            </a:r>
+          </a:p>
+        </p:txBody>
+      </p:sp>
+      <p:sp>
+        <p:nvSpPr>
+          <p:cNvPr id="7" name="TextBox 6">
+            <a:extLst>
+              <a:ext uri="{FF2B5EF4-FFF2-40B4-BE49-F238E27FC236}">
+                <a16:creationId xmlns:a16="http://schemas.microsoft.com/office/drawing/2014/main" id="{9C69AF5D-D6E2-8E64-BC21-D2B588ADDF8B}"/>
+              </a:ext>
+            </a:extLst>
+          </p:cNvPr>
+          <p:cNvSpPr txBox="1"/>
+          <p:nvPr/>
+        </p:nvSpPr>
+        <p:spPr>
+          <a:xfrm rot="16200000">
+            <a:off x="1471957" y="3122711"/>
+            <a:ext cx="1783463" cy="307777"/>
+          </a:xfrm>
+          <a:prstGeom prst="rect">
+            <a:avLst/>
+          </a:prstGeom>
+          <a:solidFill>
+            <a:schemeClr val="bg1"/>
+          </a:solidFill>
+        </p:spPr>
+        <p:txBody>
+          <a:bodyPr wrap="square" rtlCol="0">
+            <a:spAutoFit/>
+          </a:bodyPr>
+          <a:lstStyle/>
+          <a:p>
+            <a:pPr algn="ctr"/>
+            <a:r>
+              <a:rPr lang="en-US" sz="1400" b="1" dirty="0">
+                <a:latin typeface="Arial" panose="020B0604020202020204" pitchFamily="34" charset="0"/>
+                <a:cs typeface="Arial" panose="020B0604020202020204" pitchFamily="34" charset="0"/>
+              </a:rPr>
+              <a:t>Original Series</a:t>
             </a:r>
           </a:p>
         </p:txBody>

--- a/BSTS_SC/bsts_figures.pptx
+++ b/BSTS_SC/bsts_figures.pptx
@@ -4212,11 +4212,11 @@
           <a:p>
             <a:pPr algn="ctr"/>
             <a:r>
-              <a:rPr lang="en-US" sz="1400" b="1" dirty="0">
+              <a:rPr lang="en-US" sz="1400" dirty="0">
                 <a:latin typeface="Arial" panose="020B0604020202020204" pitchFamily="34" charset="0"/>
                 <a:cs typeface="Arial" panose="020B0604020202020204" pitchFamily="34" charset="0"/>
               </a:rPr>
-              <a:t>Original Series</a:t>
+              <a:t>AQI</a:t>
             </a:r>
           </a:p>
         </p:txBody>
